--- a/smp544_ppt_assets/SMP544_analysis_summary.pptx
+++ b/smp544_ppt_assets/SMP544_analysis_summary.pptx
@@ -14,6 +14,11 @@
     <p:sldId id="265" r:id="rId8"/>
     <p:sldId id="263" r:id="rId9"/>
     <p:sldId id="260" r:id="rId10"/>
+    <p:sldId id="266" r:id="rId11"/>
+    <p:sldId id="267" r:id="rId12"/>
+    <p:sldId id="268" r:id="rId13"/>
+    <p:sldId id="269" r:id="rId14"/>
+    <p:sldId id="270" r:id="rId15"/>
   </p:sldIdLst>
   <p:sldSz cx="12192000" cy="6858000"/>
   <p:notesSz cx="6858000" cy="9144000"/>
@@ -267,7 +272,7 @@
           <a:p>
             <a:fld id="{927E05CD-30B7-C440-B567-06235F5E5228}" type="datetimeFigureOut">
               <a:rPr lang="en-US" smtClean="0"/>
-              <a:t>8/27/26</a:t>
+              <a:t>9/3/26</a:t>
             </a:fld>
             <a:endParaRPr lang="en-US"/>
           </a:p>
@@ -465,7 +470,7 @@
           <a:p>
             <a:fld id="{927E05CD-30B7-C440-B567-06235F5E5228}" type="datetimeFigureOut">
               <a:rPr lang="en-US" smtClean="0"/>
-              <a:t>8/27/26</a:t>
+              <a:t>9/3/26</a:t>
             </a:fld>
             <a:endParaRPr lang="en-US"/>
           </a:p>
@@ -673,7 +678,7 @@
           <a:p>
             <a:fld id="{927E05CD-30B7-C440-B567-06235F5E5228}" type="datetimeFigureOut">
               <a:rPr lang="en-US" smtClean="0"/>
-              <a:t>8/27/26</a:t>
+              <a:t>9/3/26</a:t>
             </a:fld>
             <a:endParaRPr lang="en-US"/>
           </a:p>
@@ -871,7 +876,7 @@
           <a:p>
             <a:fld id="{927E05CD-30B7-C440-B567-06235F5E5228}" type="datetimeFigureOut">
               <a:rPr lang="en-US" smtClean="0"/>
-              <a:t>8/27/26</a:t>
+              <a:t>9/3/26</a:t>
             </a:fld>
             <a:endParaRPr lang="en-US"/>
           </a:p>
@@ -1146,7 +1151,7 @@
           <a:p>
             <a:fld id="{927E05CD-30B7-C440-B567-06235F5E5228}" type="datetimeFigureOut">
               <a:rPr lang="en-US" smtClean="0"/>
-              <a:t>8/27/26</a:t>
+              <a:t>9/3/26</a:t>
             </a:fld>
             <a:endParaRPr lang="en-US"/>
           </a:p>
@@ -1411,7 +1416,7 @@
           <a:p>
             <a:fld id="{927E05CD-30B7-C440-B567-06235F5E5228}" type="datetimeFigureOut">
               <a:rPr lang="en-US" smtClean="0"/>
-              <a:t>8/27/26</a:t>
+              <a:t>9/3/26</a:t>
             </a:fld>
             <a:endParaRPr lang="en-US"/>
           </a:p>
@@ -1823,7 +1828,7 @@
           <a:p>
             <a:fld id="{927E05CD-30B7-C440-B567-06235F5E5228}" type="datetimeFigureOut">
               <a:rPr lang="en-US" smtClean="0"/>
-              <a:t>8/27/26</a:t>
+              <a:t>9/3/26</a:t>
             </a:fld>
             <a:endParaRPr lang="en-US"/>
           </a:p>
@@ -1964,7 +1969,7 @@
           <a:p>
             <a:fld id="{927E05CD-30B7-C440-B567-06235F5E5228}" type="datetimeFigureOut">
               <a:rPr lang="en-US" smtClean="0"/>
-              <a:t>8/27/26</a:t>
+              <a:t>9/3/26</a:t>
             </a:fld>
             <a:endParaRPr lang="en-US"/>
           </a:p>
@@ -2077,7 +2082,7 @@
           <a:p>
             <a:fld id="{927E05CD-30B7-C440-B567-06235F5E5228}" type="datetimeFigureOut">
               <a:rPr lang="en-US" smtClean="0"/>
-              <a:t>8/27/26</a:t>
+              <a:t>9/3/26</a:t>
             </a:fld>
             <a:endParaRPr lang="en-US"/>
           </a:p>
@@ -2388,7 +2393,7 @@
           <a:p>
             <a:fld id="{927E05CD-30B7-C440-B567-06235F5E5228}" type="datetimeFigureOut">
               <a:rPr lang="en-US" smtClean="0"/>
-              <a:t>8/27/26</a:t>
+              <a:t>9/3/26</a:t>
             </a:fld>
             <a:endParaRPr lang="en-US"/>
           </a:p>
@@ -2676,7 +2681,7 @@
           <a:p>
             <a:fld id="{927E05CD-30B7-C440-B567-06235F5E5228}" type="datetimeFigureOut">
               <a:rPr lang="en-US" smtClean="0"/>
-              <a:t>8/27/26</a:t>
+              <a:t>9/3/26</a:t>
             </a:fld>
             <a:endParaRPr lang="en-US"/>
           </a:p>
@@ -2917,7 +2922,7 @@
           <a:p>
             <a:fld id="{927E05CD-30B7-C440-B567-06235F5E5228}" type="datetimeFigureOut">
               <a:rPr lang="en-US" smtClean="0"/>
-              <a:t>8/27/26</a:t>
+              <a:t>9/3/26</a:t>
             </a:fld>
             <a:endParaRPr lang="en-US"/>
           </a:p>
@@ -3403,6 +3408,561 @@
 </p:sld>
 </file>
 
+<file path=ppt/slides/slide10.xml><?xml version="1.0" encoding="utf-8"?>
+<p:sld xmlns:a="http://schemas.openxmlformats.org/drawingml/2006/main" xmlns:r="http://schemas.openxmlformats.org/officeDocument/2006/relationships" xmlns:p="http://schemas.openxmlformats.org/presentationml/2006/main">
+  <p:cSld>
+    <p:spTree>
+      <p:nvGrpSpPr>
+        <p:cNvPr id="1" name=""/>
+        <p:cNvGrpSpPr/>
+        <p:nvPr/>
+      </p:nvGrpSpPr>
+      <p:grpSpPr>
+        <a:xfrm>
+          <a:off x="0" y="0"/>
+          <a:ext cx="0" cy="0"/>
+          <a:chOff x="0" y="0"/>
+          <a:chExt cx="0" cy="0"/>
+        </a:xfrm>
+      </p:grpSpPr>
+      <p:pic>
+        <p:nvPicPr>
+          <p:cNvPr id="2" name="Picture 1">
+            <a:extLst>
+              <a:ext uri="{FF2B5EF4-FFF2-40B4-BE49-F238E27FC236}">
+                <a16:creationId xmlns:a16="http://schemas.microsoft.com/office/drawing/2014/main" id="{6B80FFA2-E387-997F-0904-A324ADC4FB1E}"/>
+              </a:ext>
+            </a:extLst>
+          </p:cNvPr>
+          <p:cNvPicPr>
+            <a:picLocks noChangeAspect="1"/>
+          </p:cNvPicPr>
+          <p:nvPr/>
+        </p:nvPicPr>
+        <p:blipFill>
+          <a:blip r:embed="rId2"/>
+          <a:stretch>
+            <a:fillRect/>
+          </a:stretch>
+        </p:blipFill>
+        <p:spPr>
+          <a:xfrm>
+            <a:off x="93932" y="1303583"/>
+            <a:ext cx="5667777" cy="4250833"/>
+          </a:xfrm>
+          <a:prstGeom prst="rect">
+            <a:avLst/>
+          </a:prstGeom>
+        </p:spPr>
+      </p:pic>
+      <p:pic>
+        <p:nvPicPr>
+          <p:cNvPr id="3" name="Picture 2">
+            <a:extLst>
+              <a:ext uri="{FF2B5EF4-FFF2-40B4-BE49-F238E27FC236}">
+                <a16:creationId xmlns:a16="http://schemas.microsoft.com/office/drawing/2014/main" id="{FDCFDEE5-8A7F-C938-38C6-A11D984D9E78}"/>
+              </a:ext>
+            </a:extLst>
+          </p:cNvPr>
+          <p:cNvPicPr>
+            <a:picLocks noChangeAspect="1"/>
+          </p:cNvPicPr>
+          <p:nvPr/>
+        </p:nvPicPr>
+        <p:blipFill>
+          <a:blip r:embed="rId3"/>
+          <a:stretch>
+            <a:fillRect/>
+          </a:stretch>
+        </p:blipFill>
+        <p:spPr>
+          <a:xfrm>
+            <a:off x="6619703" y="1303583"/>
+            <a:ext cx="5478365" cy="4058048"/>
+          </a:xfrm>
+          <a:prstGeom prst="rect">
+            <a:avLst/>
+          </a:prstGeom>
+        </p:spPr>
+      </p:pic>
+      <p:sp>
+        <p:nvSpPr>
+          <p:cNvPr id="4" name="TextBox 3">
+            <a:extLst>
+              <a:ext uri="{FF2B5EF4-FFF2-40B4-BE49-F238E27FC236}">
+                <a16:creationId xmlns:a16="http://schemas.microsoft.com/office/drawing/2014/main" id="{CAE31C71-DF0B-A7F3-B687-831F309F0819}"/>
+              </a:ext>
+            </a:extLst>
+          </p:cNvPr>
+          <p:cNvSpPr txBox="1"/>
+          <p:nvPr/>
+        </p:nvSpPr>
+        <p:spPr>
+          <a:xfrm>
+            <a:off x="763929" y="451413"/>
+            <a:ext cx="1000595" cy="369332"/>
+          </a:xfrm>
+          <a:prstGeom prst="rect">
+            <a:avLst/>
+          </a:prstGeom>
+          <a:noFill/>
+        </p:spPr>
+        <p:txBody>
+          <a:bodyPr wrap="none" rtlCol="0">
+            <a:spAutoFit/>
+          </a:bodyPr>
+          <a:lstStyle/>
+          <a:p>
+            <a:r>
+              <a:rPr lang="en-US" dirty="0"/>
+              <a:t>SMP544</a:t>
+            </a:r>
+          </a:p>
+        </p:txBody>
+      </p:sp>
+    </p:spTree>
+    <p:extLst>
+      <p:ext uri="{BB962C8B-B14F-4D97-AF65-F5344CB8AC3E}">
+        <p14:creationId xmlns:p14="http://schemas.microsoft.com/office/powerpoint/2010/main" val="959204199"/>
+      </p:ext>
+    </p:extLst>
+  </p:cSld>
+  <p:clrMapOvr>
+    <a:masterClrMapping/>
+  </p:clrMapOvr>
+</p:sld>
+</file>
+
+<file path=ppt/slides/slide11.xml><?xml version="1.0" encoding="utf-8"?>
+<p:sld xmlns:a="http://schemas.openxmlformats.org/drawingml/2006/main" xmlns:r="http://schemas.openxmlformats.org/officeDocument/2006/relationships" xmlns:p="http://schemas.openxmlformats.org/presentationml/2006/main">
+  <p:cSld>
+    <p:spTree>
+      <p:nvGrpSpPr>
+        <p:cNvPr id="1" name=""/>
+        <p:cNvGrpSpPr/>
+        <p:nvPr/>
+      </p:nvGrpSpPr>
+      <p:grpSpPr>
+        <a:xfrm>
+          <a:off x="0" y="0"/>
+          <a:ext cx="0" cy="0"/>
+          <a:chOff x="0" y="0"/>
+          <a:chExt cx="0" cy="0"/>
+        </a:xfrm>
+      </p:grpSpPr>
+      <p:pic>
+        <p:nvPicPr>
+          <p:cNvPr id="2" name="Picture 1">
+            <a:extLst>
+              <a:ext uri="{FF2B5EF4-FFF2-40B4-BE49-F238E27FC236}">
+                <a16:creationId xmlns:a16="http://schemas.microsoft.com/office/drawing/2014/main" id="{C066CB5A-D217-61AE-C9D7-575C0389A38B}"/>
+              </a:ext>
+            </a:extLst>
+          </p:cNvPr>
+          <p:cNvPicPr>
+            <a:picLocks noChangeAspect="1"/>
+          </p:cNvPicPr>
+          <p:nvPr/>
+        </p:nvPicPr>
+        <p:blipFill>
+          <a:blip r:embed="rId2"/>
+          <a:stretch>
+            <a:fillRect/>
+          </a:stretch>
+        </p:blipFill>
+        <p:spPr>
+          <a:xfrm>
+            <a:off x="0" y="1143000"/>
+            <a:ext cx="6273800" cy="4705350"/>
+          </a:xfrm>
+          <a:prstGeom prst="rect">
+            <a:avLst/>
+          </a:prstGeom>
+        </p:spPr>
+      </p:pic>
+      <p:pic>
+        <p:nvPicPr>
+          <p:cNvPr id="3" name="Picture 2" descr="Image preview">
+            <a:extLst>
+              <a:ext uri="{FF2B5EF4-FFF2-40B4-BE49-F238E27FC236}">
+                <a16:creationId xmlns:a16="http://schemas.microsoft.com/office/drawing/2014/main" id="{E3DC114F-FF72-71A7-0BA8-360B7AAD7342}"/>
+              </a:ext>
+            </a:extLst>
+          </p:cNvPr>
+          <p:cNvPicPr>
+            <a:picLocks noChangeAspect="1"/>
+          </p:cNvPicPr>
+          <p:nvPr/>
+        </p:nvPicPr>
+        <p:blipFill>
+          <a:blip r:embed="rId3"/>
+          <a:stretch>
+            <a:fillRect/>
+          </a:stretch>
+        </p:blipFill>
+        <p:spPr>
+          <a:xfrm>
+            <a:off x="5918200" y="1276350"/>
+            <a:ext cx="6273800" cy="4572000"/>
+          </a:xfrm>
+          <a:prstGeom prst="rect">
+            <a:avLst/>
+          </a:prstGeom>
+        </p:spPr>
+      </p:pic>
+      <p:sp>
+        <p:nvSpPr>
+          <p:cNvPr id="4" name="TextBox 3">
+            <a:extLst>
+              <a:ext uri="{FF2B5EF4-FFF2-40B4-BE49-F238E27FC236}">
+                <a16:creationId xmlns:a16="http://schemas.microsoft.com/office/drawing/2014/main" id="{7BEFAAB7-643A-5CF5-BDDC-5E1C7905FBCF}"/>
+              </a:ext>
+            </a:extLst>
+          </p:cNvPr>
+          <p:cNvSpPr txBox="1"/>
+          <p:nvPr/>
+        </p:nvSpPr>
+        <p:spPr>
+          <a:xfrm>
+            <a:off x="694481" y="439838"/>
+            <a:ext cx="1000595" cy="369332"/>
+          </a:xfrm>
+          <a:prstGeom prst="rect">
+            <a:avLst/>
+          </a:prstGeom>
+          <a:noFill/>
+        </p:spPr>
+        <p:txBody>
+          <a:bodyPr wrap="none" rtlCol="0">
+            <a:spAutoFit/>
+          </a:bodyPr>
+          <a:lstStyle/>
+          <a:p>
+            <a:r>
+              <a:rPr lang="en-US" dirty="0"/>
+              <a:t>SMP544</a:t>
+            </a:r>
+          </a:p>
+        </p:txBody>
+      </p:sp>
+    </p:spTree>
+    <p:extLst>
+      <p:ext uri="{BB962C8B-B14F-4D97-AF65-F5344CB8AC3E}">
+        <p14:creationId xmlns:p14="http://schemas.microsoft.com/office/powerpoint/2010/main" val="2322584692"/>
+      </p:ext>
+    </p:extLst>
+  </p:cSld>
+  <p:clrMapOvr>
+    <a:masterClrMapping/>
+  </p:clrMapOvr>
+</p:sld>
+</file>
+
+<file path=ppt/slides/slide12.xml><?xml version="1.0" encoding="utf-8"?>
+<p:sld xmlns:a="http://schemas.openxmlformats.org/drawingml/2006/main" xmlns:r="http://schemas.openxmlformats.org/officeDocument/2006/relationships" xmlns:p="http://schemas.openxmlformats.org/presentationml/2006/main">
+  <p:cSld>
+    <p:spTree>
+      <p:nvGrpSpPr>
+        <p:cNvPr id="1" name=""/>
+        <p:cNvGrpSpPr/>
+        <p:nvPr/>
+      </p:nvGrpSpPr>
+      <p:grpSpPr>
+        <a:xfrm>
+          <a:off x="0" y="0"/>
+          <a:ext cx="0" cy="0"/>
+          <a:chOff x="0" y="0"/>
+          <a:chExt cx="0" cy="0"/>
+        </a:xfrm>
+      </p:grpSpPr>
+      <p:pic>
+        <p:nvPicPr>
+          <p:cNvPr id="3" name="Picture 2">
+            <a:extLst>
+              <a:ext uri="{FF2B5EF4-FFF2-40B4-BE49-F238E27FC236}">
+                <a16:creationId xmlns:a16="http://schemas.microsoft.com/office/drawing/2014/main" id="{0F959D3B-E648-5296-CDCB-1EB8E3CCF419}"/>
+              </a:ext>
+            </a:extLst>
+          </p:cNvPr>
+          <p:cNvPicPr>
+            <a:picLocks noChangeAspect="1"/>
+          </p:cNvPicPr>
+          <p:nvPr/>
+        </p:nvPicPr>
+        <p:blipFill>
+          <a:blip r:embed="rId2"/>
+          <a:stretch>
+            <a:fillRect/>
+          </a:stretch>
+        </p:blipFill>
+        <p:spPr>
+          <a:xfrm>
+            <a:off x="366532" y="1280931"/>
+            <a:ext cx="5697316" cy="4272987"/>
+          </a:xfrm>
+          <a:prstGeom prst="rect">
+            <a:avLst/>
+          </a:prstGeom>
+        </p:spPr>
+      </p:pic>
+      <p:pic>
+        <p:nvPicPr>
+          <p:cNvPr id="5" name="Picture 4">
+            <a:extLst>
+              <a:ext uri="{FF2B5EF4-FFF2-40B4-BE49-F238E27FC236}">
+                <a16:creationId xmlns:a16="http://schemas.microsoft.com/office/drawing/2014/main" id="{9CD57A1A-EAAC-92D8-E2F2-D9DE70D8B508}"/>
+              </a:ext>
+            </a:extLst>
+          </p:cNvPr>
+          <p:cNvPicPr>
+            <a:picLocks noChangeAspect="1"/>
+          </p:cNvPicPr>
+          <p:nvPr/>
+        </p:nvPicPr>
+        <p:blipFill>
+          <a:blip r:embed="rId3"/>
+          <a:stretch>
+            <a:fillRect/>
+          </a:stretch>
+        </p:blipFill>
+        <p:spPr>
+          <a:xfrm>
+            <a:off x="6128152" y="1292506"/>
+            <a:ext cx="5697316" cy="4272987"/>
+          </a:xfrm>
+          <a:prstGeom prst="rect">
+            <a:avLst/>
+          </a:prstGeom>
+        </p:spPr>
+      </p:pic>
+      <p:sp>
+        <p:nvSpPr>
+          <p:cNvPr id="6" name="TextBox 5">
+            <a:extLst>
+              <a:ext uri="{FF2B5EF4-FFF2-40B4-BE49-F238E27FC236}">
+                <a16:creationId xmlns:a16="http://schemas.microsoft.com/office/drawing/2014/main" id="{8F2084D2-9FC6-6074-D26D-3E6C0AC1F63E}"/>
+              </a:ext>
+            </a:extLst>
+          </p:cNvPr>
+          <p:cNvSpPr txBox="1"/>
+          <p:nvPr/>
+        </p:nvSpPr>
+        <p:spPr>
+          <a:xfrm>
+            <a:off x="936434" y="683046"/>
+            <a:ext cx="947695" cy="369332"/>
+          </a:xfrm>
+          <a:prstGeom prst="rect">
+            <a:avLst/>
+          </a:prstGeom>
+          <a:noFill/>
+        </p:spPr>
+        <p:txBody>
+          <a:bodyPr wrap="none" rtlCol="0">
+            <a:spAutoFit/>
+          </a:bodyPr>
+          <a:lstStyle/>
+          <a:p>
+            <a:r>
+              <a:rPr lang="en-US" dirty="0"/>
+              <a:t>VES041</a:t>
+            </a:r>
+          </a:p>
+        </p:txBody>
+      </p:sp>
+    </p:spTree>
+    <p:extLst>
+      <p:ext uri="{BB962C8B-B14F-4D97-AF65-F5344CB8AC3E}">
+        <p14:creationId xmlns:p14="http://schemas.microsoft.com/office/powerpoint/2010/main" val="108914026"/>
+      </p:ext>
+    </p:extLst>
+  </p:cSld>
+  <p:clrMapOvr>
+    <a:masterClrMapping/>
+  </p:clrMapOvr>
+</p:sld>
+</file>
+
+<file path=ppt/slides/slide13.xml><?xml version="1.0" encoding="utf-8"?>
+<p:sld xmlns:a="http://schemas.openxmlformats.org/drawingml/2006/main" xmlns:r="http://schemas.openxmlformats.org/officeDocument/2006/relationships" xmlns:p="http://schemas.openxmlformats.org/presentationml/2006/main">
+  <p:cSld>
+    <p:spTree>
+      <p:nvGrpSpPr>
+        <p:cNvPr id="1" name=""/>
+        <p:cNvGrpSpPr/>
+        <p:nvPr/>
+      </p:nvGrpSpPr>
+      <p:grpSpPr>
+        <a:xfrm>
+          <a:off x="0" y="0"/>
+          <a:ext cx="0" cy="0"/>
+          <a:chOff x="0" y="0"/>
+          <a:chExt cx="0" cy="0"/>
+        </a:xfrm>
+      </p:grpSpPr>
+      <p:pic>
+        <p:nvPicPr>
+          <p:cNvPr id="3" name="Picture 2">
+            <a:extLst>
+              <a:ext uri="{FF2B5EF4-FFF2-40B4-BE49-F238E27FC236}">
+                <a16:creationId xmlns:a16="http://schemas.microsoft.com/office/drawing/2014/main" id="{CD3BF6BD-CBDC-E064-984C-2D98C5600767}"/>
+              </a:ext>
+            </a:extLst>
+          </p:cNvPr>
+          <p:cNvPicPr>
+            <a:picLocks noChangeAspect="1"/>
+          </p:cNvPicPr>
+          <p:nvPr/>
+        </p:nvPicPr>
+        <p:blipFill>
+          <a:blip r:embed="rId2"/>
+          <a:stretch>
+            <a:fillRect/>
+          </a:stretch>
+        </p:blipFill>
+        <p:spPr>
+          <a:xfrm>
+            <a:off x="6682342" y="1362878"/>
+            <a:ext cx="5509658" cy="4132244"/>
+          </a:xfrm>
+          <a:prstGeom prst="rect">
+            <a:avLst/>
+          </a:prstGeom>
+        </p:spPr>
+      </p:pic>
+      <p:pic>
+        <p:nvPicPr>
+          <p:cNvPr id="5" name="Picture 4">
+            <a:extLst>
+              <a:ext uri="{FF2B5EF4-FFF2-40B4-BE49-F238E27FC236}">
+                <a16:creationId xmlns:a16="http://schemas.microsoft.com/office/drawing/2014/main" id="{C7ACE6DF-1661-E36F-7769-8588FCA0D4F4}"/>
+              </a:ext>
+            </a:extLst>
+          </p:cNvPr>
+          <p:cNvPicPr>
+            <a:picLocks noChangeAspect="1"/>
+          </p:cNvPicPr>
+          <p:nvPr/>
+        </p:nvPicPr>
+        <p:blipFill>
+          <a:blip r:embed="rId3"/>
+          <a:stretch>
+            <a:fillRect/>
+          </a:stretch>
+        </p:blipFill>
+        <p:spPr>
+          <a:xfrm>
+            <a:off x="-24482" y="1362878"/>
+            <a:ext cx="5509658" cy="4132244"/>
+          </a:xfrm>
+          <a:prstGeom prst="rect">
+            <a:avLst/>
+          </a:prstGeom>
+        </p:spPr>
+      </p:pic>
+    </p:spTree>
+    <p:extLst>
+      <p:ext uri="{BB962C8B-B14F-4D97-AF65-F5344CB8AC3E}">
+        <p14:creationId xmlns:p14="http://schemas.microsoft.com/office/powerpoint/2010/main" val="1015786277"/>
+      </p:ext>
+    </p:extLst>
+  </p:cSld>
+  <p:clrMapOvr>
+    <a:masterClrMapping/>
+  </p:clrMapOvr>
+</p:sld>
+</file>
+
+<file path=ppt/slides/slide14.xml><?xml version="1.0" encoding="utf-8"?>
+<p:sld xmlns:a="http://schemas.openxmlformats.org/drawingml/2006/main" xmlns:r="http://schemas.openxmlformats.org/officeDocument/2006/relationships" xmlns:p="http://schemas.openxmlformats.org/presentationml/2006/main">
+  <p:cSld>
+    <p:spTree>
+      <p:nvGrpSpPr>
+        <p:cNvPr id="1" name=""/>
+        <p:cNvGrpSpPr/>
+        <p:nvPr/>
+      </p:nvGrpSpPr>
+      <p:grpSpPr>
+        <a:xfrm>
+          <a:off x="0" y="0"/>
+          <a:ext cx="0" cy="0"/>
+          <a:chOff x="0" y="0"/>
+          <a:chExt cx="0" cy="0"/>
+        </a:xfrm>
+      </p:grpSpPr>
+      <p:pic>
+        <p:nvPicPr>
+          <p:cNvPr id="3" name="Picture 2">
+            <a:extLst>
+              <a:ext uri="{FF2B5EF4-FFF2-40B4-BE49-F238E27FC236}">
+                <a16:creationId xmlns:a16="http://schemas.microsoft.com/office/drawing/2014/main" id="{0FBB21C5-EEE0-C52A-24D9-580292A5188B}"/>
+              </a:ext>
+            </a:extLst>
+          </p:cNvPr>
+          <p:cNvPicPr>
+            <a:picLocks noChangeAspect="1"/>
+          </p:cNvPicPr>
+          <p:nvPr/>
+        </p:nvPicPr>
+        <p:blipFill>
+          <a:blip r:embed="rId2"/>
+          <a:stretch>
+            <a:fillRect/>
+          </a:stretch>
+        </p:blipFill>
+        <p:spPr>
+          <a:xfrm>
+            <a:off x="5999296" y="1221036"/>
+            <a:ext cx="5887903" cy="4415927"/>
+          </a:xfrm>
+          <a:prstGeom prst="rect">
+            <a:avLst/>
+          </a:prstGeom>
+        </p:spPr>
+      </p:pic>
+      <p:pic>
+        <p:nvPicPr>
+          <p:cNvPr id="5" name="Picture 4">
+            <a:extLst>
+              <a:ext uri="{FF2B5EF4-FFF2-40B4-BE49-F238E27FC236}">
+                <a16:creationId xmlns:a16="http://schemas.microsoft.com/office/drawing/2014/main" id="{BC8B6C68-AF1A-45DD-FA58-BDD9BEF21D70}"/>
+              </a:ext>
+            </a:extLst>
+          </p:cNvPr>
+          <p:cNvPicPr>
+            <a:picLocks noChangeAspect="1"/>
+          </p:cNvPicPr>
+          <p:nvPr/>
+        </p:nvPicPr>
+        <p:blipFill>
+          <a:blip r:embed="rId3"/>
+          <a:stretch>
+            <a:fillRect/>
+          </a:stretch>
+        </p:blipFill>
+        <p:spPr>
+          <a:xfrm>
+            <a:off x="0" y="1221036"/>
+            <a:ext cx="5887903" cy="4415927"/>
+          </a:xfrm>
+          <a:prstGeom prst="rect">
+            <a:avLst/>
+          </a:prstGeom>
+        </p:spPr>
+      </p:pic>
+    </p:spTree>
+    <p:extLst>
+      <p:ext uri="{BB962C8B-B14F-4D97-AF65-F5344CB8AC3E}">
+        <p14:creationId xmlns:p14="http://schemas.microsoft.com/office/powerpoint/2010/main" val="3054504922"/>
+      </p:ext>
+    </p:extLst>
+  </p:cSld>
+  <p:clrMapOvr>
+    <a:masterClrMapping/>
+  </p:clrMapOvr>
+</p:sld>
+</file>
+
 <file path=ppt/slides/slide2.xml><?xml version="1.0" encoding="utf-8"?>
 <p:sld xmlns:a="http://schemas.openxmlformats.org/drawingml/2006/main" xmlns:r="http://schemas.openxmlformats.org/officeDocument/2006/relationships" xmlns:p="http://schemas.openxmlformats.org/presentationml/2006/main">
   <p:cSld>
@@ -3666,7 +4226,7 @@
         </p:blipFill>
         <p:spPr>
           <a:xfrm>
-            <a:off x="6524756" y="1693305"/>
+            <a:off x="6076704" y="2271529"/>
             <a:ext cx="6385601" cy="4789201"/>
           </a:xfrm>
           <a:prstGeom prst="rect">
@@ -3698,36 +4258,6 @@
           <a:xfrm>
             <a:off x="0" y="1090374"/>
             <a:ext cx="6524756" cy="4893567"/>
-          </a:xfrm>
-          <a:prstGeom prst="rect">
-            <a:avLst/>
-          </a:prstGeom>
-        </p:spPr>
-      </p:pic>
-      <p:pic>
-        <p:nvPicPr>
-          <p:cNvPr id="16" name="Picture 15">
-            <a:extLst>
-              <a:ext uri="{FF2B5EF4-FFF2-40B4-BE49-F238E27FC236}">
-                <a16:creationId xmlns:a16="http://schemas.microsoft.com/office/drawing/2014/main" id="{58E68916-22CF-5B1C-450D-CAFD82EBBCCE}"/>
-              </a:ext>
-            </a:extLst>
-          </p:cNvPr>
-          <p:cNvPicPr>
-            <a:picLocks noChangeAspect="1"/>
-          </p:cNvPicPr>
-          <p:nvPr/>
-        </p:nvPicPr>
-        <p:blipFill>
-          <a:blip r:embed="rId6"/>
-          <a:stretch>
-            <a:fillRect/>
-          </a:stretch>
-        </p:blipFill>
-        <p:spPr>
-          <a:xfrm>
-            <a:off x="601150" y="1801906"/>
-            <a:ext cx="6172200" cy="4572000"/>
           </a:xfrm>
           <a:prstGeom prst="rect">
             <a:avLst/>
@@ -3913,8 +4443,8 @@
         </p:blipFill>
         <p:spPr>
           <a:xfrm>
-            <a:off x="3321269" y="168323"/>
-            <a:ext cx="8719924" cy="6539943"/>
+            <a:off x="6096000" y="2241138"/>
+            <a:ext cx="6072197" cy="4554148"/>
           </a:xfrm>
           <a:prstGeom prst="rect">
             <a:avLst/>
